--- a/outputs/Propuestas_analitica_Distribuidora_Panamericana_clasificacion_tabla.pptx
+++ b/outputs/Propuestas_analitica_Distribuidora_Panamericana_clasificacion_tabla.pptx
@@ -5758,13 +5758,82 @@
               </a:defRPr>
             </a:pPr>
             <a:r>
-              <a:rPr sz="2625" b="1">
+              <a:rPr sz="2625" b="1" dirty="0" err="1">
                 <a:solidFill>
                   <a:srgbClr val="12356B"/>
                 </a:solidFill>
               </a:rPr>
-              <a:t>Recomendar productos mediante similitud entre ítems</a:t>
-            </a:r>
+              <a:t>Recomendar</a:t>
+            </a:r>
+            <a:r>
+              <a:rPr sz="2625" b="1" dirty="0">
+                <a:solidFill>
+                  <a:srgbClr val="12356B"/>
+                </a:solidFill>
+              </a:rPr>
+              <a:t> </a:t>
+            </a:r>
+            <a:r>
+              <a:rPr sz="2625" b="1" dirty="0" err="1">
+                <a:solidFill>
+                  <a:srgbClr val="12356B"/>
+                </a:solidFill>
+              </a:rPr>
+              <a:t>productos</a:t>
+            </a:r>
+            <a:r>
+              <a:rPr sz="2625" b="1" dirty="0">
+                <a:solidFill>
+                  <a:srgbClr val="12356B"/>
+                </a:solidFill>
+              </a:rPr>
+              <a:t> </a:t>
+            </a:r>
+            <a:r>
+              <a:rPr sz="2625" b="1" dirty="0" err="1">
+                <a:solidFill>
+                  <a:srgbClr val="12356B"/>
+                </a:solidFill>
+              </a:rPr>
+              <a:t>mediante</a:t>
+            </a:r>
+            <a:r>
+              <a:rPr sz="2625" b="1" dirty="0">
+                <a:solidFill>
+                  <a:srgbClr val="12356B"/>
+                </a:solidFill>
+              </a:rPr>
+              <a:t> </a:t>
+            </a:r>
+            <a:r>
+              <a:rPr sz="2625" b="1" dirty="0" err="1">
+                <a:solidFill>
+                  <a:srgbClr val="12356B"/>
+                </a:solidFill>
+              </a:rPr>
+              <a:t>similitud</a:t>
+            </a:r>
+            <a:r>
+              <a:rPr sz="2625" b="1" dirty="0">
+                <a:solidFill>
+                  <a:srgbClr val="12356B"/>
+                </a:solidFill>
+              </a:rPr>
+              <a:t> entre </a:t>
+            </a:r>
+            <a:r>
+              <a:rPr sz="2625" b="1" dirty="0" err="1">
+                <a:solidFill>
+                  <a:srgbClr val="12356B"/>
+                </a:solidFill>
+              </a:rPr>
+              <a:t>ítems</a:t>
+            </a:r>
+            <a:endParaRPr sz="2625" b="1" dirty="0">
+              <a:solidFill>
+                <a:srgbClr val="12356B"/>
+              </a:solidFill>
+            </a:endParaRPr>
           </a:p>
         </p:txBody>
       </p:sp>
